--- a/ppt/BigData04-BigData.pptx
+++ b/ppt/BigData04-BigData.pptx
@@ -5322,15 +5322,7 @@
             <a:pPr lvl="1"/>
             <a:r>
               <a:rPr lang="fr-FR" dirty="0"/>
-              <a:t>Exemple, il est impossible d'effacer une facture sans </a:t>
-            </a:r>
-            <a:r>
-              <a:rPr lang="fr-FR" dirty="0" err="1"/>
-              <a:t>effecaer</a:t>
-            </a:r>
-            <a:r>
-              <a:rPr lang="fr-FR" dirty="0"/>
-              <a:t> les lignes de la facture</a:t>
+              <a:t>Exemple, il est impossible d'effacer une facture sans effacer les lignes de la facture</a:t>
             </a:r>
           </a:p>
         </p:txBody>
@@ -9046,7 +9038,10 @@
               <a:rPr lang="fr-FR" sz="2000" dirty="0" err="1"/>
               <a:t>video</a:t>
             </a:r>
-            <a:endParaRPr lang="fr-FR" sz="2000" dirty="0"/>
+            <a:r>
+              <a:rPr lang="fr-FR" sz="2000" dirty="0"/>
+              <a:t>, son</a:t>
+            </a:r>
           </a:p>
           <a:p>
             <a:r>
